--- a/MECH191_metallurgy/slideDecks/pptx/MECH191_Week16_Lecture.pptx
+++ b/MECH191_metallurgy/slideDecks/pptx/MECH191_Week16_Lecture.pptx
@@ -14831,7 +14831,7 @@
         </p:spPr>
         <p:txBody>
           <a:bodyPr wrap="none" lIns="0" rIns="0" tIns="0" bIns="0">
-            <a:spAutoFit/>
+            <a:noAutofit/>
           </a:bodyPr>
           <a:lstStyle/>
           <a:p>
@@ -14842,7 +14842,7 @@
                 </a:solidFill>
                 <a:latin typeface="Calibri"/>
               </a:rPr>
-              <a:t>Metallography Lab — Module 15</a:t>
+              <a:t>Alloy Research Portfolio — Module 15</a:t>
             </a:r>
           </a:p>
         </p:txBody>
@@ -14865,7 +14865,7 @@
         </p:spPr>
         <p:txBody>
           <a:bodyPr wrap="none" lIns="0" rIns="0" tIns="0" bIns="0">
-            <a:spAutoFit/>
+            <a:noAutofit/>
           </a:bodyPr>
           <a:lstStyle/>
           <a:p>
@@ -14876,7 +14876,7 @@
                 </a:solidFill>
                 <a:latin typeface="Calibri"/>
               </a:rPr>
-              <a:t>EXAMET-5-R-600-HD  ·  50–500×</a:t>
+              <a:t>No Microscope Required</a:t>
             </a:r>
           </a:p>
         </p:txBody>
@@ -15001,7 +15001,7 @@
         </p:spPr>
         <p:txBody>
           <a:bodyPr wrap="none" lIns="0" rIns="0" tIns="0" bIns="0">
-            <a:spAutoFit/>
+            <a:noAutofit/>
           </a:bodyPr>
           <a:lstStyle/>
           <a:p>
@@ -15012,7 +15012,7 @@
                 </a:solidFill>
                 <a:latin typeface="Calibri"/>
               </a:rPr>
-              <a:t>No new specimen this week — synthesize your observations from </a:t>
+              <a:t>No new research this week — synthesize your notes from Modules 1–14</a:t>
             </a:r>
           </a:p>
         </p:txBody>
@@ -15035,7 +15035,7 @@
         </p:spPr>
         <p:txBody>
           <a:bodyPr wrap="none" lIns="0" rIns="0" tIns="0" bIns="0">
-            <a:spAutoFit/>
+            <a:noAutofit/>
           </a:bodyPr>
           <a:lstStyle/>
           <a:p>
@@ -15046,7 +15046,7 @@
                 </a:solidFill>
                 <a:latin typeface="Calibri"/>
               </a:rPr>
-              <a:t>Modules 1–14 into the final capstone questions.</a:t>
+              <a:t>into the final capstone questions.</a:t>
             </a:r>
           </a:p>
         </p:txBody>
@@ -15103,7 +15103,7 @@
         </p:spPr>
         <p:txBody>
           <a:bodyPr wrap="none" lIns="0" rIns="0" tIns="0" bIns="0">
-            <a:spAutoFit/>
+            <a:noAutofit/>
           </a:bodyPr>
           <a:lstStyle/>
           <a:p>
@@ -15114,7 +15114,7 @@
                 </a:solidFill>
                 <a:latin typeface="Calibri"/>
               </a:rPr>
-              <a:t>1  Observe — complete feature table</a:t>
+              <a:t>1  Research — record data &amp; sources</a:t>
             </a:r>
           </a:p>
         </p:txBody>
@@ -15137,7 +15137,7 @@
         </p:spPr>
         <p:txBody>
           <a:bodyPr wrap="none" lIns="0" rIns="0" tIns="0" bIns="0">
-            <a:spAutoFit/>
+            <a:noAutofit/>
           </a:bodyPr>
           <a:lstStyle/>
           <a:p>
@@ -15148,7 +15148,7 @@
                 </a:solidFill>
                 <a:latin typeface="Calibri"/>
               </a:rPr>
-              <a:t>2  Sketch — label magnification &amp; specimen</a:t>
+              <a:t>2  Answer — short-answer questions</a:t>
             </a:r>
           </a:p>
         </p:txBody>
@@ -15171,7 +15171,7 @@
         </p:spPr>
         <p:txBody>
           <a:bodyPr wrap="none" lIns="0" rIns="0" tIns="0" bIns="0">
-            <a:spAutoFit/>
+            <a:noAutofit/>
           </a:bodyPr>
           <a:lstStyle/>
           <a:p>
@@ -15182,7 +15182,7 @@
                 </a:solidFill>
                 <a:latin typeface="Calibri"/>
               </a:rPr>
-              <a:t>3  Answer — 4 short questions</a:t>
+              <a:t>3  Apply — critical-thinking &amp; equations</a:t>
             </a:r>
           </a:p>
         </p:txBody>
@@ -15205,7 +15205,7 @@
         </p:spPr>
         <p:txBody>
           <a:bodyPr wrap="none" lIns="0" rIns="0" tIns="0" bIns="0">
-            <a:spAutoFit/>
+            <a:noAutofit/>
           </a:bodyPr>
           <a:lstStyle/>
           <a:p>
@@ -15216,7 +15216,7 @@
                 </a:solidFill>
                 <a:latin typeface="Calibri"/>
               </a:rPr>
-              <a:t>Specimens to Check Out</a:t>
+              <a:t>Alloys of Record</a:t>
             </a:r>
           </a:p>
         </p:txBody>
@@ -15239,7 +15239,7 @@
         </p:spPr>
         <p:txBody>
           <a:bodyPr wrap="none" lIns="0" rIns="0" tIns="0" bIns="0">
-            <a:spAutoFit/>
+            <a:noAutofit/>
           </a:bodyPr>
           <a:lstStyle/>
           <a:p>
@@ -15250,7 +15250,7 @@
                 </a:solidFill>
                 <a:latin typeface="Calibri"/>
               </a:rPr>
-              <a:t>· No new specimen — review notes from Modules 1–14</a:t>
+              <a:t>· No new alloy — synthesis exercise</a:t>
             </a:r>
           </a:p>
         </p:txBody>
@@ -15273,7 +15273,7 @@
         </p:spPr>
         <p:txBody>
           <a:bodyPr wrap="none" lIns="0" rIns="0" tIns="0" bIns="0">
-            <a:spAutoFit/>
+            <a:noAutofit/>
           </a:bodyPr>
           <a:lstStyle/>
           <a:p>
@@ -15284,7 +15284,7 @@
                 </a:solidFill>
                 <a:latin typeface="Calibri"/>
               </a:rPr>
-              <a:t>How to check out the kit:</a:t>
+              <a:t>How to Complete This Module:</a:t>
             </a:r>
           </a:p>
         </p:txBody>
@@ -15307,7 +15307,7 @@
         </p:spPr>
         <p:txBody>
           <a:bodyPr wrap="none" lIns="0" rIns="0" tIns="0" bIns="0">
-            <a:spAutoFit/>
+            <a:noAutofit/>
           </a:bodyPr>
           <a:lstStyle/>
           <a:p>
@@ -15318,7 +15318,7 @@
                 </a:solidFill>
                 <a:latin typeface="Calibri"/>
               </a:rPr>
-              <a:t>1  See instructor after class today</a:t>
+              <a:t>1  Research the alloy(s) using credible sources</a:t>
             </a:r>
           </a:p>
         </p:txBody>
@@ -15341,7 +15341,7 @@
         </p:spPr>
         <p:txBody>
           <a:bodyPr wrap="none" lIns="0" rIns="0" tIns="0" bIns="0">
-            <a:spAutoFit/>
+            <a:noAutofit/>
           </a:bodyPr>
           <a:lstStyle/>
           <a:p>
@@ -15352,7 +15352,7 @@
                 </a:solidFill>
                 <a:latin typeface="Calibri"/>
               </a:rPr>
-              <a:t>2  Sign out the specimen tray</a:t>
+              <a:t>2  Record data with a source citation</a:t>
             </a:r>
           </a:p>
         </p:txBody>
@@ -15375,7 +15375,7 @@
         </p:spPr>
         <p:txBody>
           <a:bodyPr wrap="none" lIns="0" rIns="0" tIns="0" bIns="0">
-            <a:spAutoFit/>
+            <a:noAutofit/>
           </a:bodyPr>
           <a:lstStyle/>
           <a:p>
@@ -15386,7 +15386,7 @@
                 </a:solidFill>
                 <a:latin typeface="Calibri"/>
               </a:rPr>
-              <a:t>3  Use the EXAMET-5 at your convenience</a:t>
+              <a:t>3  Answer the short-answer questions</a:t>
             </a:r>
           </a:p>
         </p:txBody>
@@ -15409,7 +15409,7 @@
         </p:spPr>
         <p:txBody>
           <a:bodyPr wrap="none" lIns="0" rIns="0" tIns="0" bIns="0">
-            <a:spAutoFit/>
+            <a:noAutofit/>
           </a:bodyPr>
           <a:lstStyle/>
           <a:p>
@@ -15420,7 +15420,7 @@
                 </a:solidFill>
                 <a:latin typeface="Calibri"/>
               </a:rPr>
-              <a:t>4  Return kit before leaving class</a:t>
+              <a:t>4  Answer the critical-thinking questions</a:t>
             </a:r>
           </a:p>
         </p:txBody>
@@ -15443,7 +15443,7 @@
         </p:spPr>
         <p:txBody>
           <a:bodyPr wrap="none" lIns="0" rIns="0" tIns="0" bIns="0">
-            <a:spAutoFit/>
+            <a:noAutofit/>
           </a:bodyPr>
           <a:lstStyle/>
           <a:p>
@@ -15454,7 +15454,7 @@
                 </a:solidFill>
                 <a:latin typeface="Calibri"/>
               </a:rPr>
-              <a:t>5  Submit completed module with your portfolio</a:t>
+              <a:t>5  Keep the module with your portfolio</a:t>
             </a:r>
           </a:p>
         </p:txBody>
